--- a/docs/presentation/Multi-Environment_Helm_First_Review.pptx
+++ b/docs/presentation/Multi-Environment_Helm_First_Review.pptx
@@ -11013,7 +11013,7 @@
               <a:rPr lang="en-IN" dirty="0">
                 <a:latin typeface="Bookman Old Style" panose="02050604050505020204" pitchFamily="18" charset="0"/>
               </a:rPr>
-              <a:t>[6] The Helm Authors, "Values files," Helm Documentation. https://helm.sh/docs/chart_template_guide/values_files/</a:t>
+              <a:t>[6] The Helm Authors, "Values files," Helm Documentation. [Online]. Available: https://helm.sh/docs/chart_template_guide/values_files/ (accessed Oct. 27, 2026).</a:t>
             </a:r>
             <a:br>
               <a:rPr lang="en-IN" dirty="0">
